--- a/public/materialy/1L/7/Prezentace k hodinám/8. Sociální sítě a digitální stopa.pptx
+++ b/public/materialy/1L/7/Prezentace k hodinám/8. Sociální sítě a digitální stopa.pptx
@@ -548,7 +548,7 @@
           </a:p>
           <a:p xmlns:a="http://schemas.openxmlformats.org/drawingml/2006/main">
             <a:r>
-              <a:t>Soubory: 08_profil_alex.html z balíčku V2, digitální pracovní sešit</a:t>
+              <a:t>Soubory: 8. Profil Alex.html z balíčku V2, digitální pracovní sešit</a:t>
             </a:r>
           </a:p>
           <a:p xmlns:a="http://schemas.openxmlformats.org/drawingml/2006/main">
@@ -808,7 +808,7 @@
           <a:lstStyle xmlns:a="http://schemas.openxmlformats.org/drawingml/2006/main"/>
           <a:p xmlns:a="http://schemas.openxmlformats.org/drawingml/2006/main">
             <a:r>
-              <a:t>Hlavní aktivita využívá: 08_profil_alex.html z balíčku V2, digitální pracovní sešit</a:t>
+              <a:t>Hlavní aktivita využívá: 8. Profil Alex.html z balíčku V2, digitální pracovní sešit</a:t>
             </a:r>
           </a:p>
           <a:p xmlns:a="http://schemas.openxmlformats.org/drawingml/2006/main">
@@ -3485,7 +3485,7 @@
               </a:defRPr>
             </a:pPr>
             <a:r>
-              <a:t>08_profil_alex.html z balíčku V2, digitální pracovní sešit</a:t>
+              <a:t>8. Profil Alex.html z balíčku V2, digitální pracovní sešit</a:t>
             </a:r>
           </a:p>
         </p:txBody>

--- a/public/materialy/1L/7/Prezentace k hodinám/8. Sociální sítě a digitální stopa.pptx
+++ b/public/materialy/1L/7/Prezentace k hodinám/8. Sociální sítě a digitální stopa.pptx
@@ -3485,7 +3485,7 @@
               </a:defRPr>
             </a:pPr>
             <a:r>
-              <a:t>8. Profil Alex.html z balíčku V2, digitální pracovní sešit</a:t>
+              <a:t>8. Profil Alex.html ze složky Podklady k aktivitám, digitální pracovní sešit</a:t>
             </a:r>
           </a:p>
         </p:txBody>

--- a/public/materialy/1L/7/Prezentace k hodinám/8. Sociální sítě a digitální stopa.pptx
+++ b/public/materialy/1L/7/Prezentace k hodinám/8. Sociální sítě a digitální stopa.pptx
@@ -558,7 +558,7 @@
           </a:p>
           <a:p xmlns:a="http://schemas.openxmlformats.org/drawingml/2006/main">
             <a:r>
-              <a:t>Před otevřením dalšího snímku stručně uveďte téma a nechte studenty připravit pracovní soubory.</a:t>
+              <a:t>Před otevřením dalšího snímku stručně uveď téma a nech studenty připravit pracovní soubory.</a:t>
             </a:r>
           </a:p>
         </p:txBody>
@@ -638,7 +638,7 @@
           </a:p>
           <a:p xmlns:a="http://schemas.openxmlformats.org/drawingml/2006/main">
             <a:r>
-              <a:t>Postup učitele: Uveďte jeden příklad vědomého příspěvku a jednoho automatického záznamu.</a:t>
+              <a:t>Postup učitele: Uveď jeden příklad vědomého příspěvku a jednoho automatického záznamu.</a:t>
             </a:r>
           </a:p>
           <a:p xmlns:a="http://schemas.openxmlformats.org/drawingml/2006/main">
@@ -648,7 +648,7 @@
           </a:p>
           <a:p xmlns:a="http://schemas.openxmlformats.org/drawingml/2006/main">
             <a:r>
-              <a:t>Neprozrazujte správnou odpověď. Cílem je zachytit počáteční úsudek, ke kterému se třída vrátí při reflexi.</a:t>
+              <a:t>Neprozrazuj správnou odpověď. Cílem je zachytit počáteční úsudek, ke kterému se třída vrátí při reflexi.</a:t>
             </a:r>
           </a:p>
         </p:txBody>
@@ -738,7 +738,7 @@
           </a:p>
           <a:p xmlns:a="http://schemas.openxmlformats.org/drawingml/2006/main">
             <a:r>
-              <a:t>Nechte studenty doplnit příklad ke každému bodu. Přechod k aktivitě proveďte otázkou: Jak tyto tři body použijeme na dnešní soubor?</a:t>
+              <a:t>Nech studenty doplnit příklad ke každému bodu. Přechod k aktivitě proveď otázkou: Jak tyto tři body použijeme na dnešní soubor?</a:t>
             </a:r>
           </a:p>
         </p:txBody>
@@ -818,7 +818,7 @@
           </a:p>
           <a:p xmlns:a="http://schemas.openxmlformats.org/drawingml/2006/main">
             <a:r>
-              <a:t>21–31 min – Riziko a doporučení: Požadujte vazbu: konkrétní údaj → možné zneužití → opatření.</a:t>
+              <a:t>21–31 min – Riziko a doporučení: Požaduj vazbu: konkrétní údaj → možné zneužití → opatření.</a:t>
             </a:r>
           </a:p>
           <a:p xmlns:a="http://schemas.openxmlformats.org/drawingml/2006/main">
@@ -838,7 +838,7 @@
           </a:p>
           <a:p xmlns:a="http://schemas.openxmlformats.org/drawingml/2006/main">
             <a:r>
-              <a:t>Během práce nepřebírejte myš za studenta. Pomáhejte otázkami z dalšího snímku a žádejte, aby každé rozhodnutí opřel o konkrétní znak nebo zdroj.</a:t>
+              <a:t>Během práce nepřebírej myš za studenta. Pomáhej otázkami z dalšího snímku a žádej, aby každé rozhodnutí opřel o konkrétní znak nebo zdroj.</a:t>
             </a:r>
           </a:p>
         </p:txBody>
@@ -918,7 +918,7 @@
           </a:p>
           <a:p xmlns:a="http://schemas.openxmlformats.org/drawingml/2006/main">
             <a:r>
-              <a:t>Podpora: Přidělte skupinám vždy tři konkrétní dlaždice profilu a nechte je hledat vazby pouze mezi nimi.</a:t>
+              <a:t>Podpora: Přiděl skupinám vždy tři konkrétní dlaždice profilu a nech je hledat vazby pouze mezi nimi.</a:t>
             </a:r>
           </a:p>
           <a:p xmlns:a="http://schemas.openxmlformats.org/drawingml/2006/main">
@@ -928,7 +928,7 @@
           </a:p>
           <a:p xmlns:a="http://schemas.openxmlformats.org/drawingml/2006/main">
             <a:r>
-              <a:t>Pro rychlou mezikontrolu nechte dvojice vyměnit výstup a označit jeden dobře doložený bod a jednu otázku, která ještě zůstává.</a:t>
+              <a:t>Pro rychlou mezikontrolu nech dvojice vyměnit výstup a označit jeden dobře doložený bod a jednu otázku, která ještě zůstává.</a:t>
             </a:r>
           </a:p>
         </p:txBody>
@@ -1003,12 +1003,12 @@
           </a:p>
           <a:p xmlns:a="http://schemas.openxmlformats.org/drawingml/2006/main">
             <a:r>
-              <a:t>Časté chyby a intervence: Student zesměšňuje profil. → Vraťte diskusi k návrhu bezpečnějšího sdílení; cílem není hodnotit osobu. | „Řešením je nic nesdílet.“ → Hledejte přiměřená opatření: publikum, načasování, ořez, odstranění identifikátorů a souhlas ostatních. | Skupina analyzuje skutečný profil. → Okamžitě se vraťte k fiktivnímu podkladu; nepodporujte dohledávání spolužáků.</a:t>
-            </a:r>
-          </a:p>
-          <a:p xmlns:a="http://schemas.openxmlformats.org/drawingml/2006/main">
-            <a:r>
-              <a:t>Nečtěte celý klíč. Vyberte dva studentské postupy, které vedou k odlišným závěrům, a nechte třídu určit, který je lépe podložený.</a:t>
+              <a:t>Časté chyby a intervence: Student zesměšňuje profil. → Vrať diskusi k návrhu bezpečnějšího sdílení; cílem není hodnotit osobu. | „Řešením je nic nesdílet.“ → Hledej přiměřená opatření: publikum, načasování, ořez, odstranění identifikátorů a souhlas ostatních. | Skupina analyzuje skutečný profil. → Okamžitě se vrať k fiktivnímu podkladu; nepodporuj dohledávání spolužáků.</a:t>
+            </a:r>
+          </a:p>
+          <a:p xmlns:a="http://schemas.openxmlformats.org/drawingml/2006/main">
+            <a:r>
+              <a:t>Nečti celý klíč. Vyber dva studentské postupy, které vedou k odlišným závěrům, a nech třídu určit, který je lépe podložený.</a:t>
             </a:r>
           </a:p>
         </p:txBody>
@@ -1083,7 +1083,7 @@
           </a:p>
           <a:p xmlns:a="http://schemas.openxmlformats.org/drawingml/2006/main">
             <a:r>
-              <a:t>Podpora: Přidělte skupinám vždy tři konkrétní dlaždice profilu a nechte je hledat vazby pouze mezi nimi.</a:t>
+              <a:t>Podpora: Přiděl skupinám vždy tři konkrétní dlaždice profilu a nech je hledat vazby pouze mezi nimi.</a:t>
             </a:r>
           </a:p>
           <a:p xmlns:a="http://schemas.openxmlformats.org/drawingml/2006/main">
@@ -1093,12 +1093,12 @@
           </a:p>
           <a:p xmlns:a="http://schemas.openxmlformats.org/drawingml/2006/main">
             <a:r>
-              <a:t>Když technika selže: Fotografická mřížka je vložená lokálně; při problému s prohlížečem použijte seznam příspěvků v pracovním sešitu.</a:t>
-            </a:r>
-          </a:p>
-          <a:p xmlns:a="http://schemas.openxmlformats.org/drawingml/2006/main">
-            <a:r>
-              <a:t>Vyberte způsob odevzdání předem. Odpověď použijte jako diagnostiku pro začátek další hodiny; nehodnoťte pouze formální správnost, ale konkrétnost a zdůvodnění.</a:t>
+              <a:t>Když technika selže: Fotografická mřížka je vložená lokálně; při problému s prohlížečem použij seznam příspěvků v pracovním sešitu.</a:t>
+            </a:r>
+          </a:p>
+          <a:p xmlns:a="http://schemas.openxmlformats.org/drawingml/2006/main">
+            <a:r>
+              <a:t>Vyber způsob odevzdání předem. Odpověď použij jako diagnostiku pro začátek další hodiny; nehodnoť pouze formální správnost, ale konkrétnost a zdůvodnění.</a:t>
             </a:r>
           </a:p>
         </p:txBody>

--- a/public/materialy/1L/7/Prezentace k hodinám/8. Sociální sítě a digitální stopa.pptx
+++ b/public/materialy/1L/7/Prezentace k hodinám/8. Sociální sítě a digitální stopa.pptx
@@ -548,7 +548,7 @@
           </a:p>
           <a:p xmlns:a="http://schemas.openxmlformats.org/drawingml/2006/main">
             <a:r>
-              <a:t>Soubory: 8. Profil Alex.html z balíčku V2, digitální pracovní sešit</a:t>
+              <a:t>Soubory: Profil Alex.html z balíčku V2, digitální pracovní sešit</a:t>
             </a:r>
           </a:p>
           <a:p xmlns:a="http://schemas.openxmlformats.org/drawingml/2006/main">
@@ -808,7 +808,7 @@
           <a:lstStyle xmlns:a="http://schemas.openxmlformats.org/drawingml/2006/main"/>
           <a:p xmlns:a="http://schemas.openxmlformats.org/drawingml/2006/main">
             <a:r>
-              <a:t>Hlavní aktivita využívá: 8. Profil Alex.html z balíčku V2, digitální pracovní sešit</a:t>
+              <a:t>Hlavní aktivita využívá: Profil Alex.html z balíčku V2, digitální pracovní sešit</a:t>
             </a:r>
           </a:p>
           <a:p xmlns:a="http://schemas.openxmlformats.org/drawingml/2006/main">
@@ -3485,7 +3485,7 @@
               </a:defRPr>
             </a:pPr>
             <a:r>
-              <a:t>8. Profil Alex.html ze složky Podklady k aktivitám, digitální pracovní sešit</a:t>
+              <a:t>Profil Alex.html ze složky Podklady k aktivitám, digitální pracovní sešit</a:t>
             </a:r>
           </a:p>
         </p:txBody>

--- a/public/materialy/1L/7/Prezentace k hodinám/8. Sociální sítě a digitální stopa.pptx
+++ b/public/materialy/1L/7/Prezentace k hodinám/8. Sociální sítě a digitální stopa.pptx
@@ -3229,7 +3229,7 @@
               </a:defRPr>
             </a:pPr>
             <a:r>
-              <a:t>5–43 MIN · PRÁCE</a:t>
+              <a:t>21–43 MIN · PRÁCE</a:t>
             </a:r>
           </a:p>
         </p:txBody>
@@ -5848,7 +5848,7 @@
               </a:defRPr>
             </a:pPr>
             <a:r>
-              <a:t>HODINA 8 · POSLEDNÍ 3 MINUTY</a:t>
+              <a:t>HODINA 8 · POSLEDNÍ 2 MINUTY</a:t>
             </a:r>
           </a:p>
         </p:txBody>

--- a/public/materialy/1L/7/Prezentace k hodinám/8. Sociální sítě a digitální stopa.pptx
+++ b/public/materialy/1L/7/Prezentace k hodinám/8. Sociální sítě a digitální stopa.pptx
@@ -543,22 +543,22 @@
           <a:lstStyle xmlns:a="http://schemas.openxmlformats.org/drawingml/2006/main"/>
           <a:p xmlns:a="http://schemas.openxmlformats.org/drawingml/2006/main">
             <a:r>
-              <a:t>Výukový cíl: Student propojí zdánlivě drobné údaje z veřejného profilu, určí riziko a navrhne konkrétní omezení sdílení.</a:t>
-            </a:r>
-          </a:p>
-          <a:p xmlns:a="http://schemas.openxmlformats.org/drawingml/2006/main">
-            <a:r>
-              <a:t>Soubory: Profil Alex.html z balíčku V2, digitální pracovní sešit</a:t>
-            </a:r>
-          </a:p>
-          <a:p xmlns:a="http://schemas.openxmlformats.org/drawingml/2006/main">
-            <a:r>
-              <a:t>Výstup: Tabulka zjištění–podklad–riziko–doporučení a soukromý osobní audit.</a:t>
-            </a:r>
-          </a:p>
-          <a:p xmlns:a="http://schemas.openxmlformats.org/drawingml/2006/main">
-            <a:r>
-              <a:t>Před otevřením dalšího snímku stručně uveď téma a nech studenty připravit pracovní soubory.</a:t>
+              <a:t>Výukový cíl: Student propojí zdánlivě drobné údaje z veřejného profilu, určí riziko a navrhne konkrétní omezení sdílení.</a:t>
+            </a:r>
+          </a:p>
+          <a:p xmlns:a="http://schemas.openxmlformats.org/drawingml/2006/main">
+            <a:r>
+              <a:t>Soubory: Profil Alex.html z balíčku V2, digitální pracovní sešit</a:t>
+            </a:r>
+          </a:p>
+          <a:p xmlns:a="http://schemas.openxmlformats.org/drawingml/2006/main">
+            <a:r>
+              <a:t>Výstup: Tabulka zjištění–podklad–riziko–doporučení a soukromý osobní audit.</a:t>
+            </a:r>
+          </a:p>
+          <a:p xmlns:a="http://schemas.openxmlformats.org/drawingml/2006/main">
+            <a:r>
+              <a:t>Před otevřením dalšího snímku stručně uveď téma a nech studenty připravit pracovní soubory.</a:t>
             </a:r>
           </a:p>
         </p:txBody>
@@ -633,17 +633,17 @@
           </a:p>
           <a:p xmlns:a="http://schemas.openxmlformats.org/drawingml/2006/main">
             <a:r>
-              <a:t>Činnost: Aktivní a pasivní stopa.</a:t>
-            </a:r>
-          </a:p>
-          <a:p xmlns:a="http://schemas.openxmlformats.org/drawingml/2006/main">
-            <a:r>
-              <a:t>Postup učitele: Uveď jeden příklad vědomého příspěvku a jednoho automatického záznamu.</a:t>
-            </a:r>
-          </a:p>
-          <a:p xmlns:a="http://schemas.openxmlformats.org/drawingml/2006/main">
-            <a:r>
-              <a:t>Otázka pro studenty: Co o Alexovi zjistíš, když spojíš několik běžných příspěvků?</a:t>
+              <a:t>Činnost: Aktivní a pasivní stopa.</a:t>
+            </a:r>
+          </a:p>
+          <a:p xmlns:a="http://schemas.openxmlformats.org/drawingml/2006/main">
+            <a:r>
+              <a:t>Postup učitele: Uveď jeden příklad vědomého příspěvku a jednoho automatického záznamu.</a:t>
+            </a:r>
+          </a:p>
+          <a:p xmlns:a="http://schemas.openxmlformats.org/drawingml/2006/main">
+            <a:r>
+              <a:t>Otázka pro studenty: Co o Alexovi zjistíš, když spojíš několik běžných příspěvků?</a:t>
             </a:r>
           </a:p>
           <a:p xmlns:a="http://schemas.openxmlformats.org/drawingml/2006/main">
@@ -733,12 +733,12 @@
           </a:p>
           <a:p xmlns:a="http://schemas.openxmlformats.org/drawingml/2006/main">
             <a:r>
-              <a:t>Klíčové závěry: Škola a třída: Popis profilu a fotografie z počítačové učebny umožňují odhadnout školní prostředí. | Pravidelný pohyb: Úterní bowling a ranní cesta ukazují rutinu a časy. | Bydliště a nepřítomnost: Vchod domu v kombinaci s příspěvkem o prázdném bytě zvyšuje bezpečnostní riziko.</a:t>
-            </a:r>
-          </a:p>
-          <a:p xmlns:a="http://schemas.openxmlformats.org/drawingml/2006/main">
-            <a:r>
-              <a:t>Nech studenty doplnit příklad ke každému bodu. Přechod k aktivitě proveď otázkou: Jak tyto tři body použijeme na dnešní soubor?</a:t>
+              <a:t>Klíčové závěry: Škola a třída: Popis profilu a fotografie z počítačové učebny umožňují odhadnout školní prostředí. | Pravidelný pohyb: Úterní bowling a ranní cesta ukazují rutinu a časy. | Bydliště a nepřítomnost: Vchod domu v kombinaci s příspěvkem o prázdném bytě zvyšuje bezpečnostní riziko.</a:t>
+            </a:r>
+          </a:p>
+          <a:p xmlns:a="http://schemas.openxmlformats.org/drawingml/2006/main">
+            <a:r>
+              <a:t>Nech studenty doplnit příklad ke každému bodu. Přechod k aktivitě proveď otázkou: Jak tyto tři body použijeme na dnešní soubor?</a:t>
             </a:r>
           </a:p>
         </p:txBody>
@@ -808,7 +808,7 @@
           <a:lstStyle xmlns:a="http://schemas.openxmlformats.org/drawingml/2006/main"/>
           <a:p xmlns:a="http://schemas.openxmlformats.org/drawingml/2006/main">
             <a:r>
-              <a:t>Hlavní aktivita využívá: Profil Alex.html z balíčku V2, digitální pracovní sešit</a:t>
+              <a:t>Hlavní aktivita využívá: Profil Alex.html z balíčku V2, digitální pracovní sešit</a:t>
             </a:r>
           </a:p>
           <a:p xmlns:a="http://schemas.openxmlformats.org/drawingml/2006/main">
@@ -818,7 +818,7 @@
           </a:p>
           <a:p xmlns:a="http://schemas.openxmlformats.org/drawingml/2006/main">
             <a:r>
-              <a:t>21–31 min – Riziko a doporučení: Požaduj vazbu: konkrétní údaj → možné zneužití → opatření.</a:t>
+              <a:t>21–31 min – Riziko a doporučení: Požaduj vazbu: konkrétní údaj → možné zneužití → opatření.</a:t>
             </a:r>
           </a:p>
           <a:p xmlns:a="http://schemas.openxmlformats.org/drawingml/2006/main">
@@ -833,12 +833,12 @@
           </a:p>
           <a:p xmlns:a="http://schemas.openxmlformats.org/drawingml/2006/main">
             <a:r>
-              <a:t>Požadovaný výstup: Tabulka zjištění–podklad–riziko–doporučení a soukromý osobní audit.</a:t>
-            </a:r>
-          </a:p>
-          <a:p xmlns:a="http://schemas.openxmlformats.org/drawingml/2006/main">
-            <a:r>
-              <a:t>Během práce nepřebírej myš za studenta. Pomáhej otázkami z dalšího snímku a žádej, aby každé rozhodnutí opřel o konkrétní znak nebo zdroj.</a:t>
+              <a:t>Požadovaný výstup: Tabulka zjištění–podklad–riziko–doporučení a soukromý osobní audit.</a:t>
+            </a:r>
+          </a:p>
+          <a:p xmlns:a="http://schemas.openxmlformats.org/drawingml/2006/main">
+            <a:r>
+              <a:t>Během práce nepřebírej myš za studenta. Pomáhej otázkami z dalšího snímku a žádej, aby každé rozhodnutí opřel o konkrétní znak nebo zdroj.</a:t>
             </a:r>
           </a:p>
         </p:txBody>
@@ -908,17 +908,17 @@
           <a:lstStyle xmlns:a="http://schemas.openxmlformats.org/drawingml/2006/main"/>
           <a:p xmlns:a="http://schemas.openxmlformats.org/drawingml/2006/main">
             <a:r>
-              <a:t>Kritérium úspěchu: Student vytvoří nejméně čtyři odvození z kombinace příspěvků a ke každému navrhne přiměřené opatření.</a:t>
-            </a:r>
-          </a:p>
-          <a:p xmlns:a="http://schemas.openxmlformats.org/drawingml/2006/main">
-            <a:r>
-              <a:t>Vodicí otázky: Které dva příspěvky dohromady odhalují více než každý zvlášť? | Je riziko okamžité, dlouhodobé, nebo závislé na dalším údaji? | Jak lze zachovat smysl příspěvku a přitom snížit množství zveřejněných informací?</a:t>
-            </a:r>
-          </a:p>
-          <a:p xmlns:a="http://schemas.openxmlformats.org/drawingml/2006/main">
-            <a:r>
-              <a:t>Podpora: Přiděl skupinám vždy tři konkrétní dlaždice profilu a nech je hledat vazby pouze mezi nimi.</a:t>
+              <a:t>Kritérium úspěchu: Student vytvoří nejméně čtyři odvození z kombinace příspěvků a ke každému navrhne přiměřené opatření.</a:t>
+            </a:r>
+          </a:p>
+          <a:p xmlns:a="http://schemas.openxmlformats.org/drawingml/2006/main">
+            <a:r>
+              <a:t>Vodicí otázky: Které dva příspěvky dohromady odhalují více než každý zvlášť? | Je riziko okamžité, dlouhodobé, nebo závislé na dalším údaji? | Jak lze zachovat smysl příspěvku a přitom snížit množství zveřejněných informací?</a:t>
+            </a:r>
+          </a:p>
+          <a:p xmlns:a="http://schemas.openxmlformats.org/drawingml/2006/main">
+            <a:r>
+              <a:t>Podpora: Přiděl skupinám vždy tři konkrétní dlaždice profilu a nech je hledat vazby pouze mezi nimi.</a:t>
             </a:r>
           </a:p>
           <a:p xmlns:a="http://schemas.openxmlformats.org/drawingml/2006/main">
@@ -928,7 +928,7 @@
           </a:p>
           <a:p xmlns:a="http://schemas.openxmlformats.org/drawingml/2006/main">
             <a:r>
-              <a:t>Pro rychlou mezikontrolu nech dvojice vyměnit výstup a označit jeden dobře doložený bod a jednu otázku, která ještě zůstává.</a:t>
+              <a:t>Pro rychlou mezikontrolu nech dvojice vyměnit výstup a označit jeden dobře doložený bod a jednu otázku, která ještě zůstává.</a:t>
             </a:r>
           </a:p>
         </p:txBody>
@@ -998,17 +998,17 @@
           <a:lstStyle xmlns:a="http://schemas.openxmlformats.org/drawingml/2006/main"/>
           <a:p xmlns:a="http://schemas.openxmlformats.org/drawingml/2006/main">
             <a:r>
-              <a:t>Očekávané závěry: Škola a třída: Popis profilu a fotografie z počítačové učebny umožňují odhadnout školní prostředí. | Pravidelný pohyb: Úterní bowling a ranní cesta ukazují rutinu a časy. | Bydliště a nepřítomnost: Vchod domu v kombinaci s příspěvkem o prázdném bytě zvyšuje bezpečnostní riziko. | Datum narození: Dort s číslem 16 a datum příspěvku umožňují odvodit část data narození. | Zařízení: Krabice notebooku nebo čitelný identifikátor může usnadnit cílený podvod či reklamaci. | Další osoby: Skupinová fotografie může zveřejnit podobu, místo a sociální vazby lidí, kteří s tím nepočítali.</a:t>
-            </a:r>
-          </a:p>
-          <a:p xmlns:a="http://schemas.openxmlformats.org/drawingml/2006/main">
-            <a:r>
-              <a:t>Časté chyby a intervence: Student zesměšňuje profil. → Vrať diskusi k návrhu bezpečnějšího sdílení; cílem není hodnotit osobu. | „Řešením je nic nesdílet.“ → Hledej přiměřená opatření: publikum, načasování, ořez, odstranění identifikátorů a souhlas ostatních. | Skupina analyzuje skutečný profil. → Okamžitě se vrať k fiktivnímu podkladu; nepodporuj dohledávání spolužáků.</a:t>
-            </a:r>
-          </a:p>
-          <a:p xmlns:a="http://schemas.openxmlformats.org/drawingml/2006/main">
-            <a:r>
-              <a:t>Nečti celý klíč. Vyber dva studentské postupy, které vedou k odlišným závěrům, a nech třídu určit, který je lépe podložený.</a:t>
+              <a:t>Očekávané závěry: Škola a třída: Popis profilu a fotografie z počítačové učebny umožňují odhadnout školní prostředí. | Pravidelný pohyb: Úterní bowling a ranní cesta ukazují rutinu a časy. | Bydliště a nepřítomnost: Vchod domu v kombinaci s příspěvkem o prázdném bytě zvyšuje bezpečnostní riziko. | Datum narození: Dort s číslem 16 a datum příspěvku umožňují odvodit část data narození. | Zařízení: Krabice notebooku nebo čitelný identifikátor může usnadnit cílený podvod či reklamaci. | Další osoby: Skupinová fotografie může zveřejnit podobu, místo a sociální vazby lidí, kteří s tím nepočítali.</a:t>
+            </a:r>
+          </a:p>
+          <a:p xmlns:a="http://schemas.openxmlformats.org/drawingml/2006/main">
+            <a:r>
+              <a:t>Časté chyby a intervence: Student zesměšňuje profil. → Vrať diskusi k návrhu bezpečnějšího sdílení; cílem není hodnotit osobu. | „Řešením je nic nesdílet.“ → Hledej přiměřená opatření: publikum, načasování, ořez, odstranění identifikátorů a souhlas ostatních. | Skupina analyzuje skutečný profil. → Okamžitě se vrať k fiktivnímu podkladu; nepodporuj dohledávání spolužáků.</a:t>
+            </a:r>
+          </a:p>
+          <a:p xmlns:a="http://schemas.openxmlformats.org/drawingml/2006/main">
+            <a:r>
+              <a:t>Nečti celý klíč. Vyber dva studentské postupy, které vedou k odlišným závěrům, a nech třídu určit, který je lépe podložený.</a:t>
             </a:r>
           </a:p>
         </p:txBody>
@@ -1083,7 +1083,7 @@
           </a:p>
           <a:p xmlns:a="http://schemas.openxmlformats.org/drawingml/2006/main">
             <a:r>
-              <a:t>Podpora: Přiděl skupinám vždy tři konkrétní dlaždice profilu a nech je hledat vazby pouze mezi nimi.</a:t>
+              <a:t>Podpora: Přiděl skupinám vždy tři konkrétní dlaždice profilu a nech je hledat vazby pouze mezi nimi.</a:t>
             </a:r>
           </a:p>
           <a:p xmlns:a="http://schemas.openxmlformats.org/drawingml/2006/main">
@@ -1093,12 +1093,12 @@
           </a:p>
           <a:p xmlns:a="http://schemas.openxmlformats.org/drawingml/2006/main">
             <a:r>
-              <a:t>Když technika selže: Fotografická mřížka je vložená lokálně; při problému s prohlížečem použij seznam příspěvků v pracovním sešitu.</a:t>
-            </a:r>
-          </a:p>
-          <a:p xmlns:a="http://schemas.openxmlformats.org/drawingml/2006/main">
-            <a:r>
-              <a:t>Vyber způsob odevzdání předem. Odpověď použij jako diagnostiku pro začátek další hodiny; nehodnoť pouze formální správnost, ale konkrétnost a zdůvodnění.</a:t>
+              <a:t>Když technika selže: Fotografická mřížka je vložená lokálně; při problému s prohlížečem použij seznam příspěvků v pracovním sešitu.</a:t>
+            </a:r>
+          </a:p>
+          <a:p xmlns:a="http://schemas.openxmlformats.org/drawingml/2006/main">
+            <a:r>
+              <a:t>Vyber způsob odevzdání předem. Odpověď použij jako diagnostiku pro začátek další hodiny; nehodnoť pouze formální správnost, ale konkrétnost a zdůvodnění.</a:t>
             </a:r>
           </a:p>
         </p:txBody>
@@ -1829,7 +1829,7 @@
             </a:pPr>
             <a:r>
               <a:t>INTERNET, BEZPEČNOST
-A PRÁCE S INFORMACEMI</a:t>
+A PRÁCE S INFORMACEMI</a:t>
             </a:r>
           </a:p>
         </p:txBody>
@@ -1874,7 +1874,7 @@
               </a:defRPr>
             </a:pPr>
             <a:r>
-              <a:t>Sociální sítě a digitální stopa</a:t>
+              <a:t>Sociální sítě a digitální stopa</a:t>
             </a:r>
           </a:p>
         </p:txBody>
@@ -1919,7 +1919,7 @@
               </a:defRPr>
             </a:pPr>
             <a:r>
-              <a:t>Student propojí zdánlivě drobné údaje z veřejného profilu, určí riziko a navrhne konkrétní omezení sdílení.</a:t>
+              <a:t>Student propojí zdánlivě drobné údaje z veřejného profilu, určí riziko a navrhne konkrétní omezení sdílení.</a:t>
             </a:r>
           </a:p>
         </p:txBody>
@@ -2387,7 +2387,7 @@
               </a:defRPr>
             </a:pPr>
             <a:r>
-              <a:t>Co o Alexovi zjistíš, když spojíš několik běžných příspěvků?</a:t>
+              <a:t>Co o Alexovi zjistíš, když spojíš několik běžných příspěvků?</a:t>
             </a:r>
           </a:p>
         </p:txBody>
@@ -2809,7 +2809,7 @@
               </a:defRPr>
             </a:pPr>
             <a:r>
-              <a:t>Jeden běžný údaj často nestačí. Riziko vzniká kombinací místa, času, rutiny a vztahů.</a:t>
+              <a:t>Jeden běžný údaj často nestačí. Riziko vzniká kombinací místa, času, rutiny a vztahů.</a:t>
             </a:r>
           </a:p>
         </p:txBody>
@@ -2944,7 +2944,7 @@
               </a:defRPr>
             </a:pPr>
             <a:r>
-              <a:t>Ke každému zjištění uveď podklad, možné zneužití a závažnost — bez hodnocení člověka.</a:t>
+              <a:t>Ke každému zjištění uveď podklad, možné zneužití a závažnost — bez hodnocení člověka.</a:t>
             </a:r>
           </a:p>
         </p:txBody>
@@ -3155,7 +3155,7 @@
               </a:defRPr>
             </a:pPr>
             <a:r>
-              <a:t>Nejde o rychlý tip. Jde o postup, který lze vysvětlit a zopakovat.</a:t>
+              <a:t>Nejde o rychlý tip. Jde o postup, který lze vysvětlit a zopakovat.</a:t>
             </a:r>
           </a:p>
         </p:txBody>
@@ -3485,7 +3485,7 @@
               </a:defRPr>
             </a:pPr>
             <a:r>
-              <a:t>Profil Alex.html ze složky Podklady k aktivitám, digitální pracovní sešit</a:t>
+              <a:t>Profil Alex.html ze složky Podklady k aktivitám, digitální pracovní sešit</a:t>
             </a:r>
           </a:p>
         </p:txBody>
@@ -3983,7 +3983,7 @@
               </a:defRPr>
             </a:pPr>
             <a:r>
-              <a:t>Výsledek osobního auditu neodevzdávej, nefotografuj a nesdílej.</a:t>
+              <a:t>Výsledek osobního auditu neodevzdávej, nefotografuj a nesdílej.</a:t>
             </a:r>
           </a:p>
         </p:txBody>
@@ -4073,7 +4073,7 @@
               </a:defRPr>
             </a:pPr>
             <a:r>
-              <a:t>Tabulka zjištění–podklad–riziko–doporučení a soukromý osobní audit.</a:t>
+              <a:t>Tabulka zjištění–podklad–riziko–doporučení a soukromý osobní audit.</a:t>
             </a:r>
           </a:p>
         </p:txBody>
@@ -4479,7 +4479,7 @@
               </a:defRPr>
             </a:pPr>
             <a:r>
-              <a:t>Student vytvoří nejméně čtyři odvození z kombinace příspěvků a ke každému navrhne přiměřené opatření.</a:t>
+              <a:t>Student vytvoří nejméně čtyři odvození z kombinace příspěvků a ke každému navrhne přiměřené opatření.</a:t>
             </a:r>
           </a:p>
         </p:txBody>
@@ -4977,7 +4977,7 @@
               </a:defRPr>
             </a:pPr>
             <a:r>
-              <a:t>Jak lze zachovat smysl příspěvku a přitom snížit množství zveřejněných informací?</a:t>
+              <a:t>Jak lze zachovat smysl příspěvku a přitom snížit množství zveřejněných informací?</a:t>
             </a:r>
           </a:p>
         </p:txBody>
@@ -5307,7 +5307,7 @@
               </a:defRPr>
             </a:pPr>
             <a:r>
-              <a:t>Škola a třída</a:t>
+              <a:t>Škola a třída</a:t>
             </a:r>
           </a:p>
         </p:txBody>
@@ -5352,7 +5352,7 @@
               </a:defRPr>
             </a:pPr>
             <a:r>
-              <a:t>Popis profilu a fotografie z počítačové učebny umožňují odhadnout školní prostředí.</a:t>
+              <a:t>Popis profilu a fotografie z počítačové učebny umožňují odhadnout školní prostředí.</a:t>
             </a:r>
           </a:p>
         </p:txBody>
@@ -5442,7 +5442,7 @@
               </a:defRPr>
             </a:pPr>
             <a:r>
-              <a:t>Úterní bowling a ranní cesta ukazují rutinu a časy.</a:t>
+              <a:t>Úterní bowling a ranní cesta ukazují rutinu a časy.</a:t>
             </a:r>
           </a:p>
         </p:txBody>
@@ -5487,7 +5487,7 @@
               </a:defRPr>
             </a:pPr>
             <a:r>
-              <a:t>Bydliště a nepřítomnost</a:t>
+              <a:t>Bydliště a nepřítomnost</a:t>
             </a:r>
           </a:p>
         </p:txBody>
@@ -5532,7 +5532,7 @@
               </a:defRPr>
             </a:pPr>
             <a:r>
-              <a:t>Vchod domu v kombinaci s příspěvkem o prázdném bytě zvyšuje bezpečnostní riziko.</a:t>
+              <a:t>Vchod domu v kombinaci s příspěvkem o prázdném bytě zvyšuje bezpečnostní riziko.</a:t>
             </a:r>
           </a:p>
         </p:txBody>
@@ -5698,7 +5698,7 @@
               </a:defRPr>
             </a:pPr>
             <a:r>
-              <a:t>Vraťte diskusi k návrhu bezpečnějšího sdílení; cílem není hodnotit osobu.</a:t>
+              <a:t>Vraťte diskusi k návrhu bezpečnějšího sdílení; cílem není hodnotit osobu.</a:t>
             </a:r>
           </a:p>
         </p:txBody>
@@ -5743,7 +5743,7 @@
               </a:defRPr>
             </a:pPr>
             <a:r>
-              <a:t>Vrať se k úvodnímu rozhodnutí. Co bys teď změnil — a proč?</a:t>
+              <a:t>Vrať se k úvodnímu rozhodnutí. Co bys teď změnil — a proč?</a:t>
             </a:r>
           </a:p>
         </p:txBody>
